--- a/lessons-v2/day14/day14.pptx
+++ b/lessons-v2/day14/day14.pptx
@@ -535,7 +535,8 @@
 ANALOGY (kitchen / inspector): the scanner = a junior who flags EVERYTHING on the checklist
 ("extinguisher expired! chipped plate! walk-in 1 degree warm!"). The assessor = the senior
 who says "the expired extinguisher by the fryer could kill someone; the plate is a note."
-ETHICS: scan only &lt;LAB_HOST&gt; (in the ROE). Metasploitable2 is the target.</a:t>
+ETHICS: scan only &lt;LAB_HOST&gt; (in the ROE). Metasploitable2 is the primary target; DVWA is the
+web-side target for `nikto`. Own lab: MS2 `10.89.1.10`, DVWA `10.89.1.20`.</a:t>
             </a:r>
             <a:endParaRPr lang="en-US" dirty="0"/>
           </a:p>
@@ -1794,7 +1795,7 @@
 false positives (it often flags things based on version alone without confirming). That's the
 lesson: the scanner is a candidate generator.
 If Nuclei is installed: `nuclei -u http://&lt;LAB_HOST&gt;` for the web side. OpenVAS is heavier -
-optional, instructor demo.
+optional, instructor demo. `nikto` above already covers the everyday web-scanner case.
 No lab? assets/sample-vulnscan.txt.</a:t>
             </a:r>
             <a:endParaRPr lang="en-US" dirty="0"/>
